--- a/docs/presentations/mouse_dataset_comparison_08252026.pptx
+++ b/docs/presentations/mouse_dataset_comparison_08252026.pptx
@@ -916,38 +916,212 @@
           <a:lstStyle/>
           <a:p>
             <a:r>
-              <a:t>What to point at:</a:t>
-            </a:r>
-          </a:p>
-          <a:p>
-            <a:r>
-              <a:t>The recommended minimum is three complementary anchors, not one supposedly complete mouse cohort. GSE185063 asks where the human APOE-associated module appears across cortical cell types. GSE241553 tests sex-aware microglia/CAM apoE induction under amyloid. GSE163857 supplies the direct APOE-by-sex-by-5xFAD factorial microglial comparison. Then add one disease-direction dataset chosen for the human cell type; GSE212606 can supplement neuronal and oligodendroglial questions.</a:t>
-            </a:r>
-          </a:p>
-          <a:p>
-            <a:endParaRPr/>
-          </a:p>
-          <a:p>
-            <a:r>
-              <a:t>Main takeaway:</a:t>
-            </a:r>
-          </a:p>
-          <a:p>
-            <a:r>
-              <a:t>Freeze the human PFC cell type, contrast, direction, and module before looking at mouse results. Analyze every study separately at its valid mouse or pooled-sample unit, then compare orthologous effect direction, ranked genes, module enrichment, and pathway concordance.</a:t>
-            </a:r>
-          </a:p>
-          <a:p>
-            <a:endParaRPr/>
-          </a:p>
-          <a:p>
-            <a:r>
-              <a:t>Boundary / transition:</a:t>
-            </a:r>
-          </a:p>
-          <a:p>
-            <a:r>
-              <a:t>Do not merge raw count matrices across these studies or erase region, disease-model, APOE, sex, and replication differences with batch correction. Agreement should be reported as triangulated external validation or convergent support—not as one complete, direct mouse PFC replication cohort.</a:t>
+              <a:rPr lang="en-US" dirty="0"/>
+              <a:t>The three datasets act as complementary tests of the same frozen human PFC finding. They should not be merged into one dataset.</a:t>
+            </a:r>
+          </a:p>
+          <a:p>
+            <a:endParaRPr lang="en-US" dirty="0"/>
+          </a:p>
+          <a:p>
+            <a:r>
+              <a:rPr lang="en-US" dirty="0"/>
+              <a:t>Dataset</a:t>
+            </a:r>
+          </a:p>
+          <a:p>
+            <a:r>
+              <a:rPr lang="en-US" dirty="0"/>
+              <a:t>Role</a:t>
+            </a:r>
+          </a:p>
+          <a:p>
+            <a:r>
+              <a:rPr lang="en-US" dirty="0"/>
+              <a:t>Main question</a:t>
+            </a:r>
+          </a:p>
+          <a:p>
+            <a:r>
+              <a:rPr lang="en-US" dirty="0"/>
+              <a:t>GSE185063</a:t>
+            </a:r>
+            <a:r>
+              <a:rPr lang="en-US" b="1" dirty="0"/>
+              <a:t>Where?</a:t>
+            </a:r>
+            <a:r>
+              <a:rPr lang="en-US" dirty="0"/>
+              <a:t>Does the APOE-associated signal appear in the corresponding cortical cell type?</a:t>
+            </a:r>
+          </a:p>
+          <a:p>
+            <a:r>
+              <a:rPr lang="en-US" dirty="0"/>
+              <a:t>GSE241553</a:t>
+            </a:r>
+            <a:r>
+              <a:rPr lang="en-US" b="1" dirty="0"/>
+              <a:t>Mechanism and </a:t>
+            </a:r>
+            <a:r>
+              <a:rPr lang="en-US" b="1" dirty="0" err="1"/>
+              <a:t>sex</a:t>
+            </a:r>
+            <a:r>
+              <a:rPr lang="en-US" dirty="0" err="1"/>
+              <a:t>Under</a:t>
+            </a:r>
+            <a:r>
+              <a:rPr lang="en-US" dirty="0"/>
+              <a:t> amyloid pathology, does apoE4 induction affect microglia differently from apoE3, and does this differ by sex?</a:t>
+            </a:r>
+          </a:p>
+          <a:p>
+            <a:r>
+              <a:rPr lang="en-US" dirty="0"/>
+              <a:t>GSE163857</a:t>
+            </a:r>
+            <a:r>
+              <a:rPr lang="en-US" b="1" dirty="0"/>
+              <a:t>Disease </a:t>
+            </a:r>
+            <a:r>
+              <a:rPr lang="en-US" b="1" dirty="0" err="1"/>
+              <a:t>interaction</a:t>
+            </a:r>
+            <a:r>
+              <a:rPr lang="en-US" dirty="0" err="1"/>
+              <a:t>Does</a:t>
+            </a:r>
+            <a:r>
+              <a:rPr lang="en-US" dirty="0"/>
+              <a:t> the APOE effect change between 5xFAD and control mice, separately in females and males?</a:t>
+            </a:r>
+          </a:p>
+          <a:p>
+            <a:endParaRPr lang="en-US" dirty="0"/>
+          </a:p>
+          <a:p>
+            <a:r>
+              <a:rPr lang="en-US" dirty="0"/>
+              <a:t>For example, suppose the human result is:</a:t>
+            </a:r>
+          </a:p>
+          <a:p>
+            <a:r>
+              <a:rPr lang="en-US" dirty="0"/>
+              <a:t>Female APOE4 AD microglia have reduced oxidative-phosphorylation activity.</a:t>
+            </a:r>
+          </a:p>
+          <a:p>
+            <a:r>
+              <a:rPr lang="en-US" dirty="0"/>
+              <a:t>Then:</a:t>
+            </a:r>
+          </a:p>
+          <a:p>
+            <a:pPr lvl="0"/>
+            <a:r>
+              <a:rPr lang="en-US" b="1" dirty="0"/>
+              <a:t>GSE185063</a:t>
+            </a:r>
+            <a:r>
+              <a:rPr lang="en-US" dirty="0"/>
+              <a:t> tests whether the same module differs between APOE4 and APOE3 in cortical microglia.</a:t>
+            </a:r>
+          </a:p>
+          <a:p>
+            <a:pPr lvl="0"/>
+            <a:r>
+              <a:rPr lang="en-US" b="1" dirty="0"/>
+              <a:t>GSE241553</a:t>
+            </a:r>
+            <a:r>
+              <a:rPr lang="en-US" dirty="0"/>
+              <a:t> tests whether apoE4 induction produces the predicted response under amyloid pathology, especially in females.</a:t>
+            </a:r>
+          </a:p>
+          <a:p>
+            <a:pPr lvl="0"/>
+            <a:r>
+              <a:rPr lang="en-US" b="1" dirty="0"/>
+              <a:t>GSE163857</a:t>
+            </a:r>
+            <a:r>
+              <a:rPr lang="en-US" dirty="0"/>
+              <a:t> tests whether the 5xFAD-versus-control effect depends on APOE and sex.</a:t>
+            </a:r>
+          </a:p>
+          <a:p>
+            <a:r>
+              <a:rPr lang="en-US" dirty="0"/>
+              <a:t>Each dataset is analyzed separately at the mouse level. We then compare:</a:t>
+            </a:r>
+          </a:p>
+          <a:p>
+            <a:pPr lvl="0"/>
+            <a:endParaRPr lang="en-US" dirty="0"/>
+          </a:p>
+          <a:p>
+            <a:pPr lvl="0"/>
+            <a:r>
+              <a:rPr lang="en-US" dirty="0"/>
+              <a:t>Direction of change</a:t>
+            </a:r>
+          </a:p>
+          <a:p>
+            <a:pPr lvl="0"/>
+            <a:r>
+              <a:rPr lang="en-US" dirty="0"/>
+              <a:t>Mouse ortholog effect sizes</a:t>
+            </a:r>
+          </a:p>
+          <a:p>
+            <a:pPr lvl="0"/>
+            <a:r>
+              <a:rPr lang="en-US" dirty="0"/>
+              <a:t>Ranked-gene enrichment</a:t>
+            </a:r>
+          </a:p>
+          <a:p>
+            <a:pPr lvl="0"/>
+            <a:r>
+              <a:rPr lang="en-US" dirty="0"/>
+              <a:t>Mitochondrial module or pathway enrichment</a:t>
+            </a:r>
+          </a:p>
+          <a:p>
+            <a:pPr lvl="0"/>
+            <a:r>
+              <a:rPr lang="en-US" dirty="0"/>
+              <a:t>Cell-type consistency</a:t>
+            </a:r>
+          </a:p>
+          <a:p>
+            <a:r>
+              <a:rPr lang="en-US" dirty="0"/>
+              <a:t>If the three independent analyses point in the same direction, the result has </a:t>
+            </a:r>
+            <a:r>
+              <a:rPr lang="en-US" b="1" dirty="0"/>
+              <a:t>convergent or triangulated support</a:t>
+            </a:r>
+            <a:r>
+              <a:rPr lang="en-US" dirty="0"/>
+              <a:t>. It does not mean that they collectively become one perfectly matched PFC cohort.</a:t>
+            </a:r>
+          </a:p>
+          <a:p>
+            <a:r>
+              <a:rPr lang="en-US" dirty="0"/>
+              <a:t>In simple terms:</a:t>
+            </a:r>
+          </a:p>
+          <a:p>
+            <a:r>
+              <a:rPr lang="en-US" dirty="0"/>
+              <a:t>GSE185063 provides the cortical location, GSE241553 provides the sex-aware amyloid mechanism, and GSE163857 provides the APOE-by-sex-by-disease test.</a:t>
             </a:r>
           </a:p>
         </p:txBody>
@@ -1320,39 +1494,195 @@
           <a:lstStyle/>
           <a:p>
             <a:r>
+              <a:rPr dirty="0"/>
               <a:t>What to point at:</a:t>
             </a:r>
           </a:p>
           <a:p>
             <a:r>
-              <a:t>Start with the role and study snapshot, then scan the eight criterion states. The letter F in names such as E3F means floxed, not female. The colored state is always paired with a factual line, so the judgment does not depend on color alone.</a:t>
-            </a:r>
-          </a:p>
-          <a:p>
-            <a:endParaRPr/>
-          </a:p>
-          <a:p>
-            <a:r>
+              <a:rPr dirty="0"/>
+              <a:t>Start with the role and study snapshot, then scan the eight criterion states. The letter F in names such as E3F means </a:t>
+            </a:r>
+            <a:r>
+              <a:rPr dirty="0" err="1"/>
+              <a:t>floxed</a:t>
+            </a:r>
+            <a:r>
+              <a:rPr dirty="0"/>
+              <a:t>, not female. The colored state is always paired with a factual line, so the judgment does not depend on color alone.</a:t>
+            </a:r>
+          </a:p>
+          <a:p>
+            <a:endParaRPr dirty="0"/>
+          </a:p>
+          <a:p>
+            <a:r>
+              <a:rPr dirty="0"/>
               <a:t>Main takeaway:</a:t>
             </a:r>
           </a:p>
           <a:p>
             <a:r>
+              <a:rPr dirty="0"/>
               <a:t>Best use: Localize human PFC APOE-associated modules across cortical cell types. Main limitation: No disease factor; sex-specific inference is unsafe without a verified mouse map.</a:t>
             </a:r>
           </a:p>
           <a:p>
-            <a:endParaRPr/>
-          </a:p>
-          <a:p>
-            <a:r>
+            <a:endParaRPr dirty="0"/>
+          </a:p>
+          <a:p>
+            <a:r>
+              <a:rPr dirty="0"/>
               <a:t>Boundary / transition:</a:t>
             </a:r>
           </a:p>
           <a:p>
             <a:r>
+              <a:rPr dirty="0"/>
               <a:t>Use the label “cortical cross-species APOE concordance”—not direct mouse PFC replication. The biological unit must remain the mouse—or the pre-sequencing pool when mice were pooled—and raw matrices from separate studies should not be merged as one cohort. The next profile applies the same criteria to GSE241553.</a:t>
             </a:r>
+            <a:endParaRPr lang="en-US" dirty="0"/>
+          </a:p>
+          <a:p>
+            <a:endParaRPr lang="en-US" dirty="0"/>
+          </a:p>
+          <a:p>
+            <a:endParaRPr lang="en-US" dirty="0"/>
+          </a:p>
+          <a:p>
+            <a:r>
+              <a:rPr lang="en-US" dirty="0"/>
+              <a:t>GSE185063 compares mice carrying human APOE3 versus APOE4, but the mice do not have an induced Alzheimer-like disease model such as 5xFAD or APP/PS1. </a:t>
+            </a:r>
+          </a:p>
+          <a:p>
+            <a:r>
+              <a:rPr lang="en-US" dirty="0"/>
+              <a:t>Therefore, it has no matched </a:t>
+            </a:r>
+            <a:r>
+              <a:rPr lang="en-US" b="1" dirty="0"/>
+              <a:t>AD-model versus non-AD control</a:t>
+            </a:r>
+            <a:r>
+              <a:rPr lang="en-US" dirty="0"/>
+              <a:t> comparison.</a:t>
+            </a:r>
+          </a:p>
+          <a:p>
+            <a:endParaRPr lang="en-US" dirty="0"/>
+          </a:p>
+          <a:p>
+            <a:r>
+              <a:rPr lang="en-US" dirty="0"/>
+              <a:t>It can answer:</a:t>
+            </a:r>
+          </a:p>
+          <a:p>
+            <a:pPr lvl="0"/>
+            <a:r>
+              <a:rPr lang="en-US" dirty="0"/>
+              <a:t>Where an APOE-associated signal appears across cortical cell types</a:t>
+            </a:r>
+          </a:p>
+          <a:p>
+            <a:pPr lvl="0"/>
+            <a:r>
+              <a:rPr lang="en-US" dirty="0"/>
+              <a:t>Whether APOE4 differs from APOE3</a:t>
+            </a:r>
+          </a:p>
+          <a:p>
+            <a:pPr lvl="0"/>
+            <a:r>
+              <a:rPr lang="en-US" dirty="0"/>
+              <a:t>Whether APOE effects vary with age</a:t>
+            </a:r>
+          </a:p>
+          <a:p>
+            <a:endParaRPr lang="en-US" dirty="0"/>
+          </a:p>
+          <a:p>
+            <a:r>
+              <a:rPr lang="en-US" dirty="0"/>
+              <a:t>It cannot answer:</a:t>
+            </a:r>
+          </a:p>
+          <a:p>
+            <a:pPr lvl="0"/>
+            <a:r>
+              <a:rPr lang="en-US" dirty="0"/>
+              <a:t>Whether the signal changes because of AD pathology</a:t>
+            </a:r>
+          </a:p>
+          <a:p>
+            <a:pPr lvl="0"/>
+            <a:r>
+              <a:rPr lang="en-US" dirty="0"/>
+              <a:t>Whether APOE modifies the disease response</a:t>
+            </a:r>
+          </a:p>
+          <a:p>
+            <a:pPr lvl="0"/>
+            <a:r>
+              <a:rPr lang="en-US" dirty="0"/>
+              <a:t>Whether an APOE × sex × disease interaction replicates</a:t>
+            </a:r>
+          </a:p>
+          <a:p>
+            <a:pPr lvl="0"/>
+            <a:r>
+              <a:rPr lang="en-US" dirty="0"/>
+              <a:t>Whether a human AD-versus-control result is reproduced</a:t>
+            </a:r>
+          </a:p>
+          <a:p>
+            <a:endParaRPr lang="en-US" dirty="0"/>
+          </a:p>
+          <a:p>
+            <a:r>
+              <a:rPr lang="en-US" dirty="0"/>
+              <a:t>There are two additional limitations:</a:t>
+            </a:r>
+          </a:p>
+          <a:p>
+            <a:pPr lvl="0"/>
+            <a:r>
+              <a:rPr lang="en-US" dirty="0"/>
+              <a:t>1. The tissue is cortex, but not explicitly PFC.</a:t>
+            </a:r>
+          </a:p>
+          <a:p>
+            <a:pPr lvl="0"/>
+            <a:r>
+              <a:rPr lang="en-US" dirty="0"/>
+              <a:t>2. Both sexes were reportedly used, but reliable mouse-level sex labels are not clearly available publicly.</a:t>
+            </a:r>
+          </a:p>
+          <a:p>
+            <a:endParaRPr lang="en-US" dirty="0"/>
+          </a:p>
+          <a:p>
+            <a:r>
+              <a:rPr lang="en-US" dirty="0"/>
+              <a:t>So the simplest interpretation is:</a:t>
+            </a:r>
+          </a:p>
+          <a:p>
+            <a:r>
+              <a:rPr lang="en-US" b="1" dirty="0"/>
+              <a:t>GSE185063 is a strong cortical APOE reference, but not an AD-disease validation dataset.</a:t>
+            </a:r>
+            <a:endParaRPr lang="en-US" dirty="0"/>
+          </a:p>
+          <a:p>
+            <a:r>
+              <a:rPr lang="en-US" dirty="0"/>
+              <a:t>The lack of an AD model is a weakness for disease validation, although it can be useful for isolating APOE-related effects without AD pathology as a confounder.</a:t>
+            </a:r>
+          </a:p>
+          <a:p>
+            <a:endParaRPr dirty="0"/>
           </a:p>
         </p:txBody>
       </p:sp>
@@ -1421,39 +1751,172 @@
           <a:lstStyle/>
           <a:p>
             <a:r>
+              <a:rPr dirty="0"/>
               <a:t>What to point at:</a:t>
             </a:r>
           </a:p>
           <a:p>
             <a:r>
+              <a:rPr dirty="0"/>
               <a:t>Start with the role and study snapshot, then scan the eight criterion states. The preferred mechanistic contrast is (E4-T − E4-C) − (E3-T − E3-C). The colored state is always paired with a factual line, so the judgment does not depend on color alone.</a:t>
             </a:r>
           </a:p>
           <a:p>
-            <a:endParaRPr/>
-          </a:p>
-          <a:p>
-            <a:r>
+            <a:endParaRPr dirty="0"/>
+          </a:p>
+          <a:p>
+            <a:r>
+              <a:rPr dirty="0"/>
               <a:t>Main takeaway:</a:t>
             </a:r>
           </a:p>
           <a:p>
             <a:r>
-              <a:t>Best use: Test sex-aware microglia/CAM apoE3-versus-apoE4 induction responses under amyloid. Main limitation: C versus T is non-induced versus induced—not control versus AD; only three mice per sex×line×induction group.</a:t>
-            </a:r>
-          </a:p>
-          <a:p>
-            <a:endParaRPr/>
-          </a:p>
-          <a:p>
-            <a:r>
+              <a:rPr dirty="0"/>
+              <a:t>Best use: Test sex-aware microglia/CAM apoE3-versus-apoE4 induction responses under amyloid. Main limitation: C versus T is non-induced versus induced—not control versus AD; only three mice per </a:t>
+            </a:r>
+            <a:r>
+              <a:rPr dirty="0" err="1"/>
+              <a:t>sex×line×induction</a:t>
+            </a:r>
+            <a:r>
+              <a:rPr dirty="0"/>
+              <a:t> group.</a:t>
+            </a:r>
+          </a:p>
+          <a:p>
+            <a:endParaRPr dirty="0"/>
+          </a:p>
+          <a:p>
+            <a:r>
+              <a:rPr dirty="0"/>
               <a:t>Boundary / transition:</a:t>
             </a:r>
           </a:p>
           <a:p>
             <a:r>
+              <a:rPr dirty="0"/>
               <a:t>Call this a microglia/CAM-specific APOE induction response under amyloid. The biological unit must remain the mouse—or the pre-sequencing pool when mice were pooled—and raw matrices from separate studies should not be merged as one cohort. The next profile applies the same criteria to GSE163857.</a:t>
             </a:r>
+            <a:endParaRPr lang="en-US" dirty="0"/>
+          </a:p>
+          <a:p>
+            <a:endParaRPr lang="en-US" dirty="0"/>
+          </a:p>
+          <a:p>
+            <a:endParaRPr lang="en-US" dirty="0"/>
+          </a:p>
+          <a:p>
+            <a:r>
+              <a:rPr lang="en-US" dirty="0"/>
+              <a:t>The main issue with GSE241553 is different from GSE185063:</a:t>
+            </a:r>
+          </a:p>
+          <a:p>
+            <a:r>
+              <a:rPr lang="en-US" b="1" dirty="0"/>
+              <a:t>GSE241553 has an amyloid disease model, but it has no non-amyloid control group.</a:t>
+            </a:r>
+            <a:endParaRPr lang="en-US" dirty="0"/>
+          </a:p>
+          <a:p>
+            <a:r>
+              <a:rPr lang="en-US" dirty="0"/>
+              <a:t>All mice are already on an amyloid-model background. The experiment compares conditional apoE3 or apoE4 induction—essentially APOE expression off versus on—not AD-model mice versus healthy controls.</a:t>
+            </a:r>
+          </a:p>
+          <a:p>
+            <a:r>
+              <a:rPr lang="en-US" dirty="0"/>
+              <a:t>It can test:</a:t>
+            </a:r>
+          </a:p>
+          <a:p>
+            <a:pPr lvl="0"/>
+            <a:r>
+              <a:rPr lang="en-US" dirty="0"/>
+              <a:t>apoE3 versus apoE4 induction under amyloid pathology</a:t>
+            </a:r>
+          </a:p>
+          <a:p>
+            <a:pPr lvl="0"/>
+            <a:r>
+              <a:rPr lang="en-US" dirty="0"/>
+              <a:t>Whether that response differs between females and males</a:t>
+            </a:r>
+          </a:p>
+          <a:p>
+            <a:pPr lvl="0"/>
+            <a:r>
+              <a:rPr lang="en-US" dirty="0"/>
+              <a:t>Microglial/CAM-specific APOE mechanisms</a:t>
+            </a:r>
+          </a:p>
+          <a:p>
+            <a:pPr lvl="0"/>
+            <a:endParaRPr lang="en-US" dirty="0"/>
+          </a:p>
+          <a:p>
+            <a:r>
+              <a:rPr lang="en-US" dirty="0"/>
+              <a:t>It cannot test:</a:t>
+            </a:r>
+          </a:p>
+          <a:p>
+            <a:pPr lvl="0"/>
+            <a:r>
+              <a:rPr lang="en-US" dirty="0"/>
+              <a:t>The effect of AD pathology itself</a:t>
+            </a:r>
+          </a:p>
+          <a:p>
+            <a:pPr lvl="0"/>
+            <a:r>
+              <a:rPr lang="en-US" dirty="0"/>
+              <a:t>AD-model versus non-AD control</a:t>
+            </a:r>
+          </a:p>
+          <a:p>
+            <a:pPr lvl="0"/>
+            <a:r>
+              <a:rPr lang="en-US" dirty="0"/>
+              <a:t>Whether APOE changes the response to developing AD pathology</a:t>
+            </a:r>
+          </a:p>
+          <a:p>
+            <a:pPr lvl="0"/>
+            <a:r>
+              <a:rPr lang="en-US" dirty="0"/>
+              <a:t>A complete APOE × sex × disease interaction</a:t>
+            </a:r>
+          </a:p>
+          <a:p>
+            <a:r>
+              <a:rPr lang="en-US" dirty="0"/>
+              <a:t>A secondary limitation is that APOE is conditionally induced mainly in microglia/CAMs, rather than representing a normal whole-animal APOE3-versus-APOE4 genotype comparison.</a:t>
+            </a:r>
+          </a:p>
+          <a:p>
+            <a:endParaRPr lang="en-US" dirty="0"/>
+          </a:p>
+          <a:p>
+            <a:r>
+              <a:rPr lang="en-US" dirty="0"/>
+              <a:t>In short:</a:t>
+            </a:r>
+          </a:p>
+          <a:p>
+            <a:r>
+              <a:rPr lang="en-US" b="1" dirty="0"/>
+              <a:t>GSE241553 is a strong sex-aware APOE mechanism study within amyloid disease, but not an AD-versus-control validation study.</a:t>
+            </a:r>
+            <a:endParaRPr lang="en-US" dirty="0"/>
+          </a:p>
+          <a:p>
+            <a:br>
+              <a:rPr lang="en-US" dirty="0"/>
+            </a:br>
+            <a:endParaRPr dirty="0"/>
           </a:p>
         </p:txBody>
       </p:sp>
@@ -8171,7 +8634,7 @@
                 </a:solidFill>
                 <a:latin typeface="Arial"/>
               </a:rPr>
-              <a:t>Modality</a:t>
+              <a:t>Data type</a:t>
             </a:r>
           </a:p>
         </p:txBody>
@@ -11184,7 +11647,7 @@
                 </a:solidFill>
                 <a:latin typeface="Arial"/>
               </a:rPr>
-              <a:t>Modality</a:t>
+              <a:t>Data type</a:t>
             </a:r>
           </a:p>
         </p:txBody>
@@ -14197,7 +14660,7 @@
                 </a:solidFill>
                 <a:latin typeface="Arial"/>
               </a:rPr>
-              <a:t>Modality</a:t>
+              <a:t>Data type</a:t>
             </a:r>
           </a:p>
         </p:txBody>
@@ -17210,7 +17673,7 @@
                 </a:solidFill>
                 <a:latin typeface="Arial"/>
               </a:rPr>
-              <a:t>Modality</a:t>
+              <a:t>Data type</a:t>
             </a:r>
           </a:p>
         </p:txBody>
@@ -20223,7 +20686,7 @@
                 </a:solidFill>
                 <a:latin typeface="Arial"/>
               </a:rPr>
-              <a:t>Modality</a:t>
+              <a:t>Data type</a:t>
             </a:r>
           </a:p>
         </p:txBody>
@@ -24843,7 +25306,7 @@
                 </a:solidFill>
                 <a:latin typeface="Arial"/>
               </a:rPr>
-              <a:t>Modality</a:t>
+              <a:t>Data type</a:t>
             </a:r>
           </a:p>
         </p:txBody>
@@ -28159,7 +28622,7 @@
                 </a:solidFill>
                 <a:latin typeface="Arial"/>
               </a:rPr>
-              <a:t>Modality</a:t>
+              <a:t>Data type</a:t>
             </a:r>
           </a:p>
         </p:txBody>
@@ -31177,7 +31640,7 @@
                 </a:solidFill>
                 <a:latin typeface="Arial"/>
               </a:rPr>
-              <a:t>Modality</a:t>
+              <a:t>Data type</a:t>
             </a:r>
           </a:p>
         </p:txBody>
@@ -32920,7 +33383,7 @@
               </a:spcAft>
             </a:pPr>
             <a:r>
-              <a:rPr sz="1950" b="1" i="0">
+              <a:rPr sz="1950" b="1" i="0" dirty="0">
                 <a:solidFill>
                   <a:srgbClr val="0F233D"/>
                 </a:solidFill>
@@ -34190,7 +34653,7 @@
                 </a:solidFill>
                 <a:latin typeface="Arial"/>
               </a:rPr>
-              <a:t>Modality</a:t>
+              <a:t>Data type</a:t>
             </a:r>
           </a:p>
         </p:txBody>
@@ -37203,7 +37666,7 @@
                 </a:solidFill>
                 <a:latin typeface="Arial"/>
               </a:rPr>
-              <a:t>Modality</a:t>
+              <a:t>Data type</a:t>
             </a:r>
           </a:p>
         </p:txBody>
@@ -40216,7 +40679,7 @@
                 </a:solidFill>
                 <a:latin typeface="Arial"/>
               </a:rPr>
-              <a:t>Modality</a:t>
+              <a:t>Data type</a:t>
             </a:r>
           </a:p>
         </p:txBody>
@@ -43229,7 +43692,7 @@
                 </a:solidFill>
                 <a:latin typeface="Arial"/>
               </a:rPr>
-              <a:t>Modality</a:t>
+              <a:t>Data type</a:t>
             </a:r>
           </a:p>
         </p:txBody>
@@ -46242,7 +46705,7 @@
                 </a:solidFill>
                 <a:latin typeface="Arial"/>
               </a:rPr>
-              <a:t>Modality</a:t>
+              <a:t>Data type</a:t>
             </a:r>
           </a:p>
         </p:txBody>
